--- a/examples/legacy-campaign-route-demo/outputs/tech-route.pptx
+++ b/examples/legacy-campaign-route-demo/outputs/tech-route.pptx
@@ -7,7 +7,7 @@
   <p:sldIdLst>
     <p:sldId id="256" r:id="rId2"/>
   </p:sldIdLst>
-  <p:sldSz cx="12192000" cy="6858000" type="wide"/>
+  <p:sldSz cx="12192000" cy="6858000" type="custom"/>
   <p:notesSz cx="6858000" cy="9144000"/>
 </p:presentation>
 </file>
@@ -93,8 +93,8 @@
         </p:nvSpPr>
         <p:spPr>
           <a:xfrm>
-            <a:off x="869999" y="533014"/>
-            <a:ext cx="10452000" cy="430000"/>
+            <a:off x="669999" y="533014"/>
+            <a:ext cx="10852000" cy="430000"/>
           </a:xfrm>
           <a:prstGeom prst="roundRect">
             <a:avLst/>
@@ -104,17 +104,17 @@
           </a:solidFill>
           <a:ln w="12700">
             <a:solidFill>
-              <a:srgbClr val="FFE4E6"/>
-            </a:solidFill>
-          </a:ln>
-        </p:spPr>
-        <p:txBody>
-          <a:bodyPr wrap="square" anchor="ctr"/>
-          <a:lstStyle/>
-          <a:p>
-            <a:pPr algn="ctr"/>
-            <a:r>
-              <a:rPr lang="en-US" sz="2100" b="1">
+              <a:srgbClr val="FDA4AF"/>
+            </a:solidFill>
+          </a:ln>
+        </p:spPr>
+        <p:txBody>
+          <a:bodyPr wrap="square" anchor="ctr"/>
+          <a:lstStyle/>
+          <a:p>
+            <a:pPr algn="ctr"/>
+            <a:r>
+              <a:rPr lang="zh-CN" sz="2100" b="1">
                 <a:solidFill>
                   <a:srgbClr val="111827"/>
                 </a:solidFill>
@@ -125,7 +125,7 @@
           <a:p>
             <a:pPr algn="ctr"/>
             <a:r>
-              <a:rPr lang="en-US" sz="2100" b="1">
+              <a:rPr lang="zh-CN" sz="2100" b="1">
                 <a:solidFill>
                   <a:srgbClr val="111827"/>
                 </a:solidFill>
@@ -143,8 +143,8 @@
         </p:nvSpPr>
         <p:spPr>
           <a:xfrm>
-            <a:off x="1699999" y="978014"/>
-            <a:ext cx="8792000" cy="190000"/>
+            <a:off x="669999" y="978014"/>
+            <a:ext cx="10852000" cy="190000"/>
           </a:xfrm>
           <a:prstGeom prst="rect">
             <a:avLst/>
@@ -164,7 +164,7 @@
           <a:p>
             <a:pPr algn="ctr"/>
             <a:r>
-              <a:rPr lang="en-US" sz="850">
+              <a:rPr lang="zh-CN" sz="850">
                 <a:solidFill>
                   <a:srgbClr val="5B6472"/>
                 </a:solidFill>
@@ -175,7 +175,7 @@
           <a:p>
             <a:pPr algn="ctr"/>
             <a:r>
-              <a:rPr lang="en-US" sz="850">
+              <a:rPr lang="zh-CN" sz="850">
                 <a:solidFill>
                   <a:srgbClr val="5B6472"/>
                 </a:solidFill>
@@ -186,7 +186,7 @@
           <a:p>
             <a:pPr algn="ctr"/>
             <a:r>
-              <a:rPr lang="en-US" sz="850">
+              <a:rPr lang="zh-CN" sz="850">
                 <a:solidFill>
                   <a:srgbClr val="5B6472"/>
                 </a:solidFill>
@@ -197,7 +197,7 @@
           <a:p>
             <a:pPr algn="ctr"/>
             <a:r>
-              <a:rPr lang="en-US" sz="850">
+              <a:rPr lang="zh-CN" sz="850">
                 <a:solidFill>
                   <a:srgbClr val="5B6472"/>
                 </a:solidFill>
@@ -236,7 +236,7 @@
           <a:p>
             <a:pPr algn="ctr"/>
             <a:r>
-              <a:rPr lang="en-US" sz="1000">
+              <a:rPr lang="zh-CN" sz="1000">
                 <a:solidFill>
                   <a:srgbClr val="111827"/>
                 </a:solidFill>
@@ -254,8 +254,8 @@
         </p:nvSpPr>
         <p:spPr>
           <a:xfrm>
-            <a:off x="765823" y="1976097"/>
-            <a:ext cx="1980762" cy="326688"/>
+            <a:off x="985823" y="1976097"/>
+            <a:ext cx="673459" cy="326688"/>
           </a:xfrm>
           <a:prstGeom prst="roundRect">
             <a:avLst/>
@@ -275,7 +275,7 @@
           <a:p>
             <a:pPr algn="ctr"/>
             <a:r>
-              <a:rPr lang="en-US" sz="1100" b="1">
+              <a:rPr lang="zh-CN" sz="1100" b="1">
                 <a:solidFill>
                   <a:srgbClr val="FFFFFF"/>
                 </a:solidFill>
@@ -314,7 +314,7 @@
           <a:p>
             <a:pPr algn="ctr"/>
             <a:r>
-              <a:rPr lang="en-US" sz="1000">
+              <a:rPr lang="zh-CN" sz="1000">
                 <a:solidFill>
                   <a:srgbClr val="111827"/>
                 </a:solidFill>
@@ -332,8 +332,8 @@
         </p:nvSpPr>
         <p:spPr>
           <a:xfrm>
-            <a:off x="2935721" y="1976097"/>
-            <a:ext cx="1980762" cy="326688"/>
+            <a:off x="3155721" y="1976097"/>
+            <a:ext cx="673459" cy="326688"/>
           </a:xfrm>
           <a:prstGeom prst="roundRect">
             <a:avLst/>
@@ -353,7 +353,7 @@
           <a:p>
             <a:pPr algn="ctr"/>
             <a:r>
-              <a:rPr lang="en-US" sz="1100" b="1">
+              <a:rPr lang="zh-CN" sz="1100" b="1">
                 <a:solidFill>
                   <a:srgbClr val="FFFFFF"/>
                 </a:solidFill>
@@ -392,7 +392,7 @@
           <a:p>
             <a:pPr algn="ctr"/>
             <a:r>
-              <a:rPr lang="en-US" sz="1000">
+              <a:rPr lang="zh-CN" sz="1000">
                 <a:solidFill>
                   <a:srgbClr val="111827"/>
                 </a:solidFill>
@@ -410,8 +410,8 @@
         </p:nvSpPr>
         <p:spPr>
           <a:xfrm>
-            <a:off x="5105618" y="1976097"/>
-            <a:ext cx="1980762" cy="326688"/>
+            <a:off x="5325618" y="1976097"/>
+            <a:ext cx="673459" cy="326688"/>
           </a:xfrm>
           <a:prstGeom prst="roundRect">
             <a:avLst/>
@@ -431,7 +431,7 @@
           <a:p>
             <a:pPr algn="ctr"/>
             <a:r>
-              <a:rPr lang="en-US" sz="1100" b="1">
+              <a:rPr lang="zh-CN" sz="1100" b="1">
                 <a:solidFill>
                   <a:srgbClr val="FFFFFF"/>
                 </a:solidFill>
@@ -470,7 +470,7 @@
           <a:p>
             <a:pPr algn="ctr"/>
             <a:r>
-              <a:rPr lang="en-US" sz="1000">
+              <a:rPr lang="zh-CN" sz="1000">
                 <a:solidFill>
                   <a:srgbClr val="111827"/>
                 </a:solidFill>
@@ -488,8 +488,8 @@
         </p:nvSpPr>
         <p:spPr>
           <a:xfrm>
-            <a:off x="7275516" y="1976097"/>
-            <a:ext cx="1980762" cy="326688"/>
+            <a:off x="7495516" y="1976097"/>
+            <a:ext cx="673459" cy="326688"/>
           </a:xfrm>
           <a:prstGeom prst="roundRect">
             <a:avLst/>
@@ -509,7 +509,7 @@
           <a:p>
             <a:pPr algn="ctr"/>
             <a:r>
-              <a:rPr lang="en-US" sz="1100" b="1">
+              <a:rPr lang="zh-CN" sz="1100" b="1">
                 <a:solidFill>
                   <a:srgbClr val="FFFFFF"/>
                 </a:solidFill>
@@ -548,7 +548,7 @@
           <a:p>
             <a:pPr algn="ctr"/>
             <a:r>
-              <a:rPr lang="en-US" sz="1000">
+              <a:rPr lang="zh-CN" sz="1000">
                 <a:solidFill>
                   <a:srgbClr val="111827"/>
                 </a:solidFill>
@@ -566,8 +566,8 @@
         </p:nvSpPr>
         <p:spPr>
           <a:xfrm>
-            <a:off x="9445414" y="1976097"/>
-            <a:ext cx="1980762" cy="326688"/>
+            <a:off x="9665414" y="1976097"/>
+            <a:ext cx="673459" cy="326688"/>
           </a:xfrm>
           <a:prstGeom prst="roundRect">
             <a:avLst/>
@@ -587,7 +587,7 @@
           <a:p>
             <a:pPr algn="ctr"/>
             <a:r>
-              <a:rPr lang="en-US" sz="1100" b="1">
+              <a:rPr lang="zh-CN" sz="1100" b="1">
                 <a:solidFill>
                   <a:srgbClr val="FFFFFF"/>
                 </a:solidFill>
@@ -813,6 +813,7 @@
             <a:solidFill>
               <a:srgbClr val="E11D48"/>
             </a:solidFill>
+            <a:prstDash val="dash"/>
             <a:headEnd type="triangle"/>
           </a:ln>
         </p:spPr>
@@ -846,7 +847,7 @@
           <a:p>
             <a:pPr algn="ctr"/>
             <a:r>
-              <a:rPr lang="en-US" sz="1050">
+              <a:rPr lang="zh-CN" sz="980">
                 <a:solidFill>
                   <a:srgbClr val="111827"/>
                 </a:solidFill>
@@ -885,7 +886,7 @@
           <a:p>
             <a:pPr algn="ctr"/>
             <a:r>
-              <a:rPr lang="en-US" sz="1050">
+              <a:rPr lang="zh-CN" sz="980">
                 <a:solidFill>
                   <a:srgbClr val="111827"/>
                 </a:solidFill>
@@ -896,7 +897,7 @@
           <a:p>
             <a:pPr algn="ctr"/>
             <a:r>
-              <a:rPr lang="en-US" sz="1050">
+              <a:rPr lang="zh-CN" sz="980">
                 <a:solidFill>
                   <a:srgbClr val="111827"/>
                 </a:solidFill>
@@ -935,7 +936,7 @@
           <a:p>
             <a:pPr algn="ctr"/>
             <a:r>
-              <a:rPr lang="en-US" sz="1050">
+              <a:rPr lang="zh-CN" sz="980">
                 <a:solidFill>
                   <a:srgbClr val="111827"/>
                 </a:solidFill>
@@ -946,7 +947,7 @@
           <a:p>
             <a:pPr algn="ctr"/>
             <a:r>
-              <a:rPr lang="en-US" sz="1050">
+              <a:rPr lang="zh-CN" sz="980">
                 <a:solidFill>
                   <a:srgbClr val="111827"/>
                 </a:solidFill>
@@ -985,7 +986,7 @@
           <a:p>
             <a:pPr algn="ctr"/>
             <a:r>
-              <a:rPr lang="en-US" sz="1050">
+              <a:rPr lang="zh-CN" sz="980">
                 <a:solidFill>
                   <a:srgbClr val="111827"/>
                 </a:solidFill>
@@ -996,7 +997,7 @@
           <a:p>
             <a:pPr algn="ctr"/>
             <a:r>
-              <a:rPr lang="en-US" sz="1050">
+              <a:rPr lang="zh-CN" sz="980">
                 <a:solidFill>
                   <a:srgbClr val="111827"/>
                 </a:solidFill>
@@ -1035,7 +1036,7 @@
           <a:p>
             <a:pPr algn="ctr"/>
             <a:r>
-              <a:rPr lang="en-US" sz="1050">
+              <a:rPr lang="zh-CN" sz="980">
                 <a:solidFill>
                   <a:srgbClr val="111827"/>
                 </a:solidFill>
@@ -1046,7 +1047,7 @@
           <a:p>
             <a:pPr algn="ctr"/>
             <a:r>
-              <a:rPr lang="en-US" sz="1050">
+              <a:rPr lang="zh-CN" sz="980">
                 <a:solidFill>
                   <a:srgbClr val="111827"/>
                 </a:solidFill>
@@ -1085,7 +1086,7 @@
           <a:p>
             <a:pPr algn="ctr"/>
             <a:r>
-              <a:rPr lang="en-US" sz="1050">
+              <a:rPr lang="zh-CN" sz="980">
                 <a:solidFill>
                   <a:srgbClr val="111827"/>
                 </a:solidFill>
@@ -1124,7 +1125,7 @@
           <a:p>
             <a:pPr algn="ctr"/>
             <a:r>
-              <a:rPr lang="en-US" sz="1050">
+              <a:rPr lang="zh-CN" sz="980">
                 <a:solidFill>
                   <a:srgbClr val="111827"/>
                 </a:solidFill>
@@ -1163,7 +1164,7 @@
           <a:p>
             <a:pPr algn="ctr"/>
             <a:r>
-              <a:rPr lang="en-US" sz="1050">
+              <a:rPr lang="zh-CN" sz="980">
                 <a:solidFill>
                   <a:srgbClr val="111827"/>
                 </a:solidFill>
@@ -1174,7 +1175,7 @@
           <a:p>
             <a:pPr algn="ctr"/>
             <a:r>
-              <a:rPr lang="en-US" sz="1050">
+              <a:rPr lang="zh-CN" sz="980">
                 <a:solidFill>
                   <a:srgbClr val="111827"/>
                 </a:solidFill>
@@ -1213,7 +1214,7 @@
           <a:p>
             <a:pPr algn="ctr"/>
             <a:r>
-              <a:rPr lang="en-US" sz="1050">
+              <a:rPr lang="zh-CN" sz="980">
                 <a:solidFill>
                   <a:srgbClr val="111827"/>
                 </a:solidFill>
@@ -1224,7 +1225,7 @@
           <a:p>
             <a:pPr algn="ctr"/>
             <a:r>
-              <a:rPr lang="en-US" sz="1050">
+              <a:rPr lang="zh-CN" sz="980">
                 <a:solidFill>
                   <a:srgbClr val="111827"/>
                 </a:solidFill>
@@ -1263,7 +1264,7 @@
           <a:p>
             <a:pPr algn="ctr"/>
             <a:r>
-              <a:rPr lang="en-US" sz="1050">
+              <a:rPr lang="zh-CN" sz="980">
                 <a:solidFill>
                   <a:srgbClr val="111827"/>
                 </a:solidFill>

--- a/examples/legacy-campaign-route-demo/outputs/tech-route.pptx
+++ b/examples/legacy-campaign-route-demo/outputs/tech-route.pptx
@@ -94,7 +94,7 @@
         <p:spPr>
           <a:xfrm>
             <a:off x="669999" y="533014"/>
-            <a:ext cx="10852000" cy="430000"/>
+            <a:ext cx="10852000" cy="500000"/>
           </a:xfrm>
           <a:prstGeom prst="roundRect">
             <a:avLst/>
@@ -119,18 +119,7 @@
                   <a:srgbClr val="111827"/>
                 </a:solidFill>
               </a:rPr>
-              <a:t>Legacy Campaign</a:t>
-            </a:r>
-          </a:p>
-          <a:p>
-            <a:pPr algn="ctr"/>
-            <a:r>
-              <a:rPr lang="zh-CN" sz="2100" b="1">
-                <a:solidFill>
-                  <a:srgbClr val="111827"/>
-                </a:solidFill>
-              </a:rPr>
-              <a:t>Strategy Route</a:t>
+              <a:t>Legacy Campaign Strategy Route</a:t>
             </a:r>
           </a:p>
         </p:txBody>
@@ -143,8 +132,8 @@
         </p:nvSpPr>
         <p:spPr>
           <a:xfrm>
-            <a:off x="669999" y="978014"/>
-            <a:ext cx="10852000" cy="190000"/>
+            <a:off x="669999" y="1023014"/>
+            <a:ext cx="10852000" cy="210000"/>
           </a:xfrm>
           <a:prstGeom prst="rect">
             <a:avLst/>
@@ -169,7 +158,7 @@
                   <a:srgbClr val="5B6472"/>
                 </a:solidFill>
               </a:rPr>
-              <a:t>Experimental</a:t>
+              <a:t>Experimental campaign route retained for</a:t>
             </a:r>
           </a:p>
           <a:p>
@@ -180,29 +169,7 @@
                   <a:srgbClr val="5B6472"/>
                 </a:solidFill>
               </a:rPr>
-              <a:t>campaign route</a:t>
-            </a:r>
-          </a:p>
-          <a:p>
-            <a:pPr algn="ctr"/>
-            <a:r>
-              <a:rPr lang="zh-CN" sz="850">
-                <a:solidFill>
-                  <a:srgbClr val="5B6472"/>
-                </a:solidFill>
-              </a:rPr>
-              <a:t>retained for</a:t>
-            </a:r>
-          </a:p>
-          <a:p>
-            <a:pPr algn="ctr"/>
-            <a:r>
-              <a:rPr lang="zh-CN" sz="850">
-                <a:solidFill>
-                  <a:srgbClr val="5B6472"/>
-                </a:solidFill>
-              </a:rPr>
-              <a:t>explicit...</a:t>
+              <a:t>explicit advertising requests</a:t>
             </a:r>
           </a:p>
         </p:txBody>
@@ -605,8 +572,8 @@
         </p:nvCxnSpPr>
         <p:spPr>
           <a:xfrm>
-            <a:off x="1756204" y="2827205"/>
-            <a:ext cx="1" cy="670570"/>
+            <a:off x="2746585" y="3652523"/>
+            <a:ext cx="189135" cy="1"/>
           </a:xfrm>
           <a:prstGeom prst="line">
             <a:avLst/>
@@ -626,9 +593,9 @@
           <p:nvPr/>
         </p:nvCxnSpPr>
         <p:spPr>
-          <a:xfrm flipV="1">
-            <a:off x="1756204" y="2827205"/>
-            <a:ext cx="2169897" cy="670570"/>
+          <a:xfrm>
+            <a:off x="4916483" y="3652523"/>
+            <a:ext cx="189135" cy="1"/>
           </a:xfrm>
           <a:prstGeom prst="line">
             <a:avLst/>
@@ -649,8 +616,8 @@
         </p:nvCxnSpPr>
         <p:spPr>
           <a:xfrm>
-            <a:off x="3926102" y="2827205"/>
-            <a:ext cx="1" cy="670570"/>
+            <a:off x="7086381" y="3652523"/>
+            <a:ext cx="189135" cy="1"/>
           </a:xfrm>
           <a:prstGeom prst="line">
             <a:avLst/>
@@ -670,9 +637,9 @@
           <p:nvPr/>
         </p:nvCxnSpPr>
         <p:spPr>
-          <a:xfrm flipV="1">
-            <a:off x="3926102" y="2827205"/>
-            <a:ext cx="2169897" cy="670570"/>
+          <a:xfrm>
+            <a:off x="9256278" y="3652523"/>
+            <a:ext cx="189135" cy="1"/>
           </a:xfrm>
           <a:prstGeom prst="line">
             <a:avLst/>
@@ -685,142 +652,9 @@
           </a:ln>
         </p:spPr>
       </p:cxnSp>
-      <p:cxnSp>
-        <p:nvCxnSpPr>
-          <p:cNvPr id="18" name="Connector 18"/>
-          <p:cNvCxnSpPr/>
-          <p:nvPr/>
-        </p:nvCxnSpPr>
-        <p:spPr>
-          <a:xfrm>
-            <a:off x="6095999" y="2827205"/>
-            <a:ext cx="1" cy="670570"/>
-          </a:xfrm>
-          <a:prstGeom prst="line">
-            <a:avLst/>
-          </a:prstGeom>
-          <a:ln w="19050">
-            <a:solidFill>
-              <a:srgbClr val="E11D48"/>
-            </a:solidFill>
-            <a:headEnd type="triangle"/>
-          </a:ln>
-        </p:spPr>
-      </p:cxnSp>
-      <p:cxnSp>
-        <p:nvCxnSpPr>
-          <p:cNvPr id="19" name="Connector 19"/>
-          <p:cNvCxnSpPr/>
-          <p:nvPr/>
-        </p:nvCxnSpPr>
-        <p:spPr>
-          <a:xfrm flipV="1">
-            <a:off x="6095999" y="2827205"/>
-            <a:ext cx="2169897" cy="670570"/>
-          </a:xfrm>
-          <a:prstGeom prst="line">
-            <a:avLst/>
-          </a:prstGeom>
-          <a:ln w="19050">
-            <a:solidFill>
-              <a:srgbClr val="E11D48"/>
-            </a:solidFill>
-            <a:headEnd type="triangle"/>
-          </a:ln>
-        </p:spPr>
-      </p:cxnSp>
-      <p:cxnSp>
-        <p:nvCxnSpPr>
-          <p:cNvPr id="20" name="Connector 20"/>
-          <p:cNvCxnSpPr/>
-          <p:nvPr/>
-        </p:nvCxnSpPr>
-        <p:spPr>
-          <a:xfrm>
-            <a:off x="8265897" y="2827205"/>
-            <a:ext cx="1" cy="670570"/>
-          </a:xfrm>
-          <a:prstGeom prst="line">
-            <a:avLst/>
-          </a:prstGeom>
-          <a:ln w="19050">
-            <a:solidFill>
-              <a:srgbClr val="E11D48"/>
-            </a:solidFill>
-            <a:headEnd type="triangle"/>
-          </a:ln>
-        </p:spPr>
-      </p:cxnSp>
-      <p:cxnSp>
-        <p:nvCxnSpPr>
-          <p:cNvPr id="21" name="Connector 21"/>
-          <p:cNvCxnSpPr/>
-          <p:nvPr/>
-        </p:nvCxnSpPr>
-        <p:spPr>
-          <a:xfrm flipV="1">
-            <a:off x="8265897" y="2827205"/>
-            <a:ext cx="2169897" cy="670570"/>
-          </a:xfrm>
-          <a:prstGeom prst="line">
-            <a:avLst/>
-          </a:prstGeom>
-          <a:ln w="19050">
-            <a:solidFill>
-              <a:srgbClr val="E11D48"/>
-            </a:solidFill>
-            <a:headEnd type="triangle"/>
-          </a:ln>
-        </p:spPr>
-      </p:cxnSp>
-      <p:cxnSp>
-        <p:nvCxnSpPr>
-          <p:cNvPr id="22" name="Connector 22"/>
-          <p:cNvCxnSpPr/>
-          <p:nvPr/>
-        </p:nvCxnSpPr>
-        <p:spPr>
-          <a:xfrm>
-            <a:off x="10435795" y="2827205"/>
-            <a:ext cx="1" cy="670570"/>
-          </a:xfrm>
-          <a:prstGeom prst="line">
-            <a:avLst/>
-          </a:prstGeom>
-          <a:ln w="19050">
-            <a:solidFill>
-              <a:srgbClr val="E11D48"/>
-            </a:solidFill>
-            <a:headEnd type="triangle"/>
-          </a:ln>
-        </p:spPr>
-      </p:cxnSp>
-      <p:cxnSp>
-        <p:nvCxnSpPr>
-          <p:cNvPr id="23" name="Connector 23"/>
-          <p:cNvCxnSpPr/>
-          <p:nvPr/>
-        </p:nvCxnSpPr>
-        <p:spPr>
-          <a:xfrm flipH="1" flipV="1">
-            <a:off x="6095999" y="2827205"/>
-            <a:ext cx="4339795" cy="670570"/>
-          </a:xfrm>
-          <a:prstGeom prst="line">
-            <a:avLst/>
-          </a:prstGeom>
-          <a:ln w="19050">
-            <a:solidFill>
-              <a:srgbClr val="E11D48"/>
-            </a:solidFill>
-            <a:prstDash val="dash"/>
-            <a:headEnd type="triangle"/>
-          </a:ln>
-        </p:spPr>
-      </p:cxnSp>
-      <p:sp>
-        <p:nvSpPr>
-          <p:cNvPr id="24" name="Node audience_segments"/>
+      <p:sp>
+        <p:nvSpPr>
+          <p:cNvPr id="18" name="Node audience_segments"/>
           <p:cNvSpPr/>
           <p:nvPr/>
         </p:nvSpPr>
@@ -847,19 +681,30 @@
           <a:p>
             <a:pPr algn="ctr"/>
             <a:r>
-              <a:rPr lang="zh-CN" sz="980">
-                <a:solidFill>
-                  <a:srgbClr val="111827"/>
-                </a:solidFill>
-              </a:rPr>
-              <a:t>Map user segments</a:t>
-            </a:r>
-          </a:p>
-        </p:txBody>
-      </p:sp>
-      <p:sp>
-        <p:nvSpPr>
-          <p:cNvPr id="25" name="Node audience_jobs"/>
+              <a:rPr lang="zh-CN" sz="930">
+                <a:solidFill>
+                  <a:srgbClr val="111827"/>
+                </a:solidFill>
+              </a:rPr>
+              <a:t>Map user</a:t>
+            </a:r>
+          </a:p>
+          <a:p>
+            <a:pPr algn="ctr"/>
+            <a:r>
+              <a:rPr lang="zh-CN" sz="930">
+                <a:solidFill>
+                  <a:srgbClr val="111827"/>
+                </a:solidFill>
+              </a:rPr>
+              <a:t>segments</a:t>
+            </a:r>
+          </a:p>
+        </p:txBody>
+      </p:sp>
+      <p:sp>
+        <p:nvSpPr>
+          <p:cNvPr id="19" name="Node audience_jobs"/>
           <p:cNvSpPr/>
           <p:nvPr/>
         </p:nvSpPr>
@@ -886,18 +731,29 @@
           <a:p>
             <a:pPr algn="ctr"/>
             <a:r>
-              <a:rPr lang="zh-CN" sz="980">
-                <a:solidFill>
-                  <a:srgbClr val="111827"/>
-                </a:solidFill>
-              </a:rPr>
-              <a:t>Clarify workflow</a:t>
-            </a:r>
-          </a:p>
-          <a:p>
-            <a:pPr algn="ctr"/>
-            <a:r>
-              <a:rPr lang="zh-CN" sz="980">
+              <a:rPr lang="zh-CN" sz="930">
+                <a:solidFill>
+                  <a:srgbClr val="111827"/>
+                </a:solidFill>
+              </a:rPr>
+              <a:t>Clarify</a:t>
+            </a:r>
+          </a:p>
+          <a:p>
+            <a:pPr algn="ctr"/>
+            <a:r>
+              <a:rPr lang="zh-CN" sz="930">
+                <a:solidFill>
+                  <a:srgbClr val="111827"/>
+                </a:solidFill>
+              </a:rPr>
+              <a:t>workflow</a:t>
+            </a:r>
+          </a:p>
+          <a:p>
+            <a:pPr algn="ctr"/>
+            <a:r>
+              <a:rPr lang="zh-CN" sz="930">
                 <a:solidFill>
                   <a:srgbClr val="111827"/>
                 </a:solidFill>
@@ -909,7 +765,7 @@
       </p:sp>
       <p:sp>
         <p:nvSpPr>
-          <p:cNvPr id="26" name="Node insight_editable"/>
+          <p:cNvPr id="20" name="Node insight_editable"/>
           <p:cNvSpPr/>
           <p:nvPr/>
         </p:nvSpPr>
@@ -936,7 +792,7 @@
           <a:p>
             <a:pPr algn="ctr"/>
             <a:r>
-              <a:rPr lang="zh-CN" sz="980">
+              <a:rPr lang="zh-CN" sz="930">
                 <a:solidFill>
                   <a:srgbClr val="111827"/>
                 </a:solidFill>
@@ -947,7 +803,7 @@
           <a:p>
             <a:pPr algn="ctr"/>
             <a:r>
-              <a:rPr lang="zh-CN" sz="980">
+              <a:rPr lang="zh-CN" sz="930">
                 <a:solidFill>
                   <a:srgbClr val="111827"/>
                 </a:solidFill>
@@ -959,7 +815,7 @@
       </p:sp>
       <p:sp>
         <p:nvSpPr>
-          <p:cNvPr id="27" name="Node insight_friction"/>
+          <p:cNvPr id="21" name="Node insight_friction"/>
           <p:cNvSpPr/>
           <p:nvPr/>
         </p:nvSpPr>
@@ -986,18 +842,29 @@
           <a:p>
             <a:pPr algn="ctr"/>
             <a:r>
-              <a:rPr lang="zh-CN" sz="980">
-                <a:solidFill>
-                  <a:srgbClr val="111827"/>
-                </a:solidFill>
-              </a:rPr>
-              <a:t>Remove drawing</a:t>
-            </a:r>
-          </a:p>
-          <a:p>
-            <a:pPr algn="ctr"/>
-            <a:r>
-              <a:rPr lang="zh-CN" sz="980">
+              <a:rPr lang="zh-CN" sz="930">
+                <a:solidFill>
+                  <a:srgbClr val="111827"/>
+                </a:solidFill>
+              </a:rPr>
+              <a:t>Remove</a:t>
+            </a:r>
+          </a:p>
+          <a:p>
+            <a:pPr algn="ctr"/>
+            <a:r>
+              <a:rPr lang="zh-CN" sz="930">
+                <a:solidFill>
+                  <a:srgbClr val="111827"/>
+                </a:solidFill>
+              </a:rPr>
+              <a:t>drawing</a:t>
+            </a:r>
+          </a:p>
+          <a:p>
+            <a:pPr algn="ctr"/>
+            <a:r>
+              <a:rPr lang="zh-CN" sz="930">
                 <a:solidFill>
                   <a:srgbClr val="111827"/>
                 </a:solidFill>
@@ -1009,7 +876,7 @@
       </p:sp>
       <p:sp>
         <p:nvSpPr>
-          <p:cNvPr id="28" name="Node message_position"/>
+          <p:cNvPr id="22" name="Node message_position"/>
           <p:cNvSpPr/>
           <p:nvPr/>
         </p:nvSpPr>
@@ -1036,18 +903,29 @@
           <a:p>
             <a:pPr algn="ctr"/>
             <a:r>
-              <a:rPr lang="zh-CN" sz="980">
-                <a:solidFill>
-                  <a:srgbClr val="111827"/>
-                </a:solidFill>
-              </a:rPr>
-              <a:t>Position workflow</a:t>
-            </a:r>
-          </a:p>
-          <a:p>
-            <a:pPr algn="ctr"/>
-            <a:r>
-              <a:rPr lang="zh-CN" sz="980">
+              <a:rPr lang="zh-CN" sz="930">
+                <a:solidFill>
+                  <a:srgbClr val="111827"/>
+                </a:solidFill>
+              </a:rPr>
+              <a:t>Position</a:t>
+            </a:r>
+          </a:p>
+          <a:p>
+            <a:pPr algn="ctr"/>
+            <a:r>
+              <a:rPr lang="zh-CN" sz="930">
+                <a:solidFill>
+                  <a:srgbClr val="111827"/>
+                </a:solidFill>
+              </a:rPr>
+              <a:t>workflow</a:t>
+            </a:r>
+          </a:p>
+          <a:p>
+            <a:pPr algn="ctr"/>
+            <a:r>
+              <a:rPr lang="zh-CN" sz="930">
                 <a:solidFill>
                   <a:srgbClr val="111827"/>
                 </a:solidFill>
@@ -1059,7 +937,7 @@
       </p:sp>
       <p:sp>
         <p:nvSpPr>
-          <p:cNvPr id="29" name="Node message_proof"/>
+          <p:cNvPr id="23" name="Node message_proof"/>
           <p:cNvSpPr/>
           <p:nvPr/>
         </p:nvSpPr>
@@ -1086,19 +964,30 @@
           <a:p>
             <a:pPr algn="ctr"/>
             <a:r>
-              <a:rPr lang="zh-CN" sz="980">
-                <a:solidFill>
-                  <a:srgbClr val="111827"/>
-                </a:solidFill>
-              </a:rPr>
-              <a:t>Show demo proof</a:t>
-            </a:r>
-          </a:p>
-        </p:txBody>
-      </p:sp>
-      <p:sp>
-        <p:nvSpPr>
-          <p:cNvPr id="30" name="Node channels_github"/>
+              <a:rPr lang="zh-CN" sz="930">
+                <a:solidFill>
+                  <a:srgbClr val="111827"/>
+                </a:solidFill>
+              </a:rPr>
+              <a:t>Show demo</a:t>
+            </a:r>
+          </a:p>
+          <a:p>
+            <a:pPr algn="ctr"/>
+            <a:r>
+              <a:rPr lang="zh-CN" sz="930">
+                <a:solidFill>
+                  <a:srgbClr val="111827"/>
+                </a:solidFill>
+              </a:rPr>
+              <a:t>proof</a:t>
+            </a:r>
+          </a:p>
+        </p:txBody>
+      </p:sp>
+      <p:sp>
+        <p:nvSpPr>
+          <p:cNvPr id="24" name="Node channels_github"/>
           <p:cNvSpPr/>
           <p:nvPr/>
         </p:nvSpPr>
@@ -1125,19 +1014,30 @@
           <a:p>
             <a:pPr algn="ctr"/>
             <a:r>
-              <a:rPr lang="zh-CN" sz="980">
-                <a:solidFill>
-                  <a:srgbClr val="111827"/>
-                </a:solidFill>
-              </a:rPr>
-              <a:t>Use GitHub hub</a:t>
-            </a:r>
-          </a:p>
-        </p:txBody>
-      </p:sp>
-      <p:sp>
-        <p:nvSpPr>
-          <p:cNvPr id="31" name="Node channels_content"/>
+              <a:rPr lang="zh-CN" sz="930">
+                <a:solidFill>
+                  <a:srgbClr val="111827"/>
+                </a:solidFill>
+              </a:rPr>
+              <a:t>Use GitHub</a:t>
+            </a:r>
+          </a:p>
+          <a:p>
+            <a:pPr algn="ctr"/>
+            <a:r>
+              <a:rPr lang="zh-CN" sz="930">
+                <a:solidFill>
+                  <a:srgbClr val="111827"/>
+                </a:solidFill>
+              </a:rPr>
+              <a:t>hub</a:t>
+            </a:r>
+          </a:p>
+        </p:txBody>
+      </p:sp>
+      <p:sp>
+        <p:nvSpPr>
+          <p:cNvPr id="25" name="Node channels_content"/>
           <p:cNvSpPr/>
           <p:nvPr/>
         </p:nvSpPr>
@@ -1164,7 +1064,7 @@
           <a:p>
             <a:pPr algn="ctr"/>
             <a:r>
-              <a:rPr lang="zh-CN" sz="980">
+              <a:rPr lang="zh-CN" sz="930">
                 <a:solidFill>
                   <a:srgbClr val="111827"/>
                 </a:solidFill>
@@ -1175,7 +1075,7 @@
           <a:p>
             <a:pPr algn="ctr"/>
             <a:r>
-              <a:rPr lang="zh-CN" sz="980">
+              <a:rPr lang="zh-CN" sz="930">
                 <a:solidFill>
                   <a:srgbClr val="111827"/>
                 </a:solidFill>
@@ -1187,7 +1087,7 @@
       </p:sp>
       <p:sp>
         <p:nvSpPr>
-          <p:cNvPr id="32" name="Node measure_metrics"/>
+          <p:cNvPr id="26" name="Node measure_metrics"/>
           <p:cNvSpPr/>
           <p:nvPr/>
         </p:nvSpPr>
@@ -1214,18 +1114,29 @@
           <a:p>
             <a:pPr algn="ctr"/>
             <a:r>
-              <a:rPr lang="zh-CN" sz="980">
-                <a:solidFill>
-                  <a:srgbClr val="111827"/>
-                </a:solidFill>
-              </a:rPr>
-              <a:t>Track adoption</a:t>
-            </a:r>
-          </a:p>
-          <a:p>
-            <a:pPr algn="ctr"/>
-            <a:r>
-              <a:rPr lang="zh-CN" sz="980">
+              <a:rPr lang="zh-CN" sz="930">
+                <a:solidFill>
+                  <a:srgbClr val="111827"/>
+                </a:solidFill>
+              </a:rPr>
+              <a:t>Track</a:t>
+            </a:r>
+          </a:p>
+          <a:p>
+            <a:pPr algn="ctr"/>
+            <a:r>
+              <a:rPr lang="zh-CN" sz="930">
+                <a:solidFill>
+                  <a:srgbClr val="111827"/>
+                </a:solidFill>
+              </a:rPr>
+              <a:t>adoption</a:t>
+            </a:r>
+          </a:p>
+          <a:p>
+            <a:pPr algn="ctr"/>
+            <a:r>
+              <a:rPr lang="zh-CN" sz="930">
                 <a:solidFill>
                   <a:srgbClr val="111827"/>
                 </a:solidFill>
@@ -1237,7 +1148,7 @@
       </p:sp>
       <p:sp>
         <p:nvSpPr>
-          <p:cNvPr id="33" name="Node measure_feedback"/>
+          <p:cNvPr id="27" name="Node measure_feedback"/>
           <p:cNvSpPr/>
           <p:nvPr/>
         </p:nvSpPr>
@@ -1264,12 +1175,23 @@
           <a:p>
             <a:pPr algn="ctr"/>
             <a:r>
-              <a:rPr lang="zh-CN" sz="980">
-                <a:solidFill>
-                  <a:srgbClr val="111827"/>
-                </a:solidFill>
-              </a:rPr>
-              <a:t>Feed back issues</a:t>
+              <a:rPr lang="zh-CN" sz="930">
+                <a:solidFill>
+                  <a:srgbClr val="111827"/>
+                </a:solidFill>
+              </a:rPr>
+              <a:t>Feed back</a:t>
+            </a:r>
+          </a:p>
+          <a:p>
+            <a:pPr algn="ctr"/>
+            <a:r>
+              <a:rPr lang="zh-CN" sz="930">
+                <a:solidFill>
+                  <a:srgbClr val="111827"/>
+                </a:solidFill>
+              </a:rPr>
+              <a:t>issues</a:t>
             </a:r>
           </a:p>
         </p:txBody>
